--- a/data/ClinicalTrials_KG.pptx
+++ b/data/ClinicalTrials_KG.pptx
@@ -5435,7 +5435,7 @@
           <a:p>
             <a:fld id="{6BF6F023-1DD6-4B99-BEF4-27691FCABB47}" type="datetimeFigureOut">
               <a:rPr lang="en-IN" smtClean="0"/>
-              <a:t>10-04-2026</a:t>
+              <a:t>07-05-2026</a:t>
             </a:fld>
             <a:endParaRPr lang="en-IN"/>
           </a:p>
@@ -6134,7 +6134,7 @@
           <a:p>
             <a:fld id="{5BCAD085-E8A6-8845-BD4E-CB4CCA059FC4}" type="datetimeFigureOut">
               <a:rPr lang="en-US" smtClean="0"/>
-              <a:t>4/10/2026</a:t>
+              <a:t>5/7/2026</a:t>
             </a:fld>
             <a:endParaRPr lang="en-US"/>
           </a:p>
@@ -6302,7 +6302,7 @@
           <a:p>
             <a:fld id="{5BCAD085-E8A6-8845-BD4E-CB4CCA059FC4}" type="datetimeFigureOut">
               <a:rPr lang="en-US" smtClean="0"/>
-              <a:t>4/10/2026</a:t>
+              <a:t>5/7/2026</a:t>
             </a:fld>
             <a:endParaRPr lang="en-US"/>
           </a:p>
@@ -6480,7 +6480,7 @@
           <a:p>
             <a:fld id="{5BCAD085-E8A6-8845-BD4E-CB4CCA059FC4}" type="datetimeFigureOut">
               <a:rPr lang="en-US" smtClean="0"/>
-              <a:t>4/10/2026</a:t>
+              <a:t>5/7/2026</a:t>
             </a:fld>
             <a:endParaRPr lang="en-US"/>
           </a:p>
@@ -6683,7 +6683,7 @@
           <a:p>
             <a:fld id="{5BCAD085-E8A6-8845-BD4E-CB4CCA059FC4}" type="datetimeFigureOut">
               <a:rPr lang="en-US" smtClean="0"/>
-              <a:t>4/10/2026</a:t>
+              <a:t>5/7/2026</a:t>
             </a:fld>
             <a:endParaRPr lang="en-US"/>
           </a:p>
@@ -6928,7 +6928,7 @@
           <a:p>
             <a:fld id="{5BCAD085-E8A6-8845-BD4E-CB4CCA059FC4}" type="datetimeFigureOut">
               <a:rPr lang="en-US" smtClean="0"/>
-              <a:t>4/10/2026</a:t>
+              <a:t>5/7/2026</a:t>
             </a:fld>
             <a:endParaRPr lang="en-US"/>
           </a:p>
@@ -7213,7 +7213,7 @@
           <a:p>
             <a:fld id="{5BCAD085-E8A6-8845-BD4E-CB4CCA059FC4}" type="datetimeFigureOut">
               <a:rPr lang="en-US" smtClean="0"/>
-              <a:t>4/10/2026</a:t>
+              <a:t>5/7/2026</a:t>
             </a:fld>
             <a:endParaRPr lang="en-US"/>
           </a:p>
@@ -7632,7 +7632,7 @@
           <a:p>
             <a:fld id="{5BCAD085-E8A6-8845-BD4E-CB4CCA059FC4}" type="datetimeFigureOut">
               <a:rPr lang="en-US" smtClean="0"/>
-              <a:t>4/10/2026</a:t>
+              <a:t>5/7/2026</a:t>
             </a:fld>
             <a:endParaRPr lang="en-US"/>
           </a:p>
@@ -7749,7 +7749,7 @@
           <a:p>
             <a:fld id="{5BCAD085-E8A6-8845-BD4E-CB4CCA059FC4}" type="datetimeFigureOut">
               <a:rPr lang="en-US" smtClean="0"/>
-              <a:t>4/10/2026</a:t>
+              <a:t>5/7/2026</a:t>
             </a:fld>
             <a:endParaRPr lang="en-US"/>
           </a:p>
@@ -7844,7 +7844,7 @@
           <a:p>
             <a:fld id="{5BCAD085-E8A6-8845-BD4E-CB4CCA059FC4}" type="datetimeFigureOut">
               <a:rPr lang="en-US" smtClean="0"/>
-              <a:t>4/10/2026</a:t>
+              <a:t>5/7/2026</a:t>
             </a:fld>
             <a:endParaRPr lang="en-US"/>
           </a:p>
@@ -8119,7 +8119,7 @@
           <a:p>
             <a:fld id="{5BCAD085-E8A6-8845-BD4E-CB4CCA059FC4}" type="datetimeFigureOut">
               <a:rPr lang="en-US" smtClean="0"/>
-              <a:t>4/10/2026</a:t>
+              <a:t>5/7/2026</a:t>
             </a:fld>
             <a:endParaRPr lang="en-US"/>
           </a:p>
@@ -8371,7 +8371,7 @@
           <a:p>
             <a:fld id="{5BCAD085-E8A6-8845-BD4E-CB4CCA059FC4}" type="datetimeFigureOut">
               <a:rPr lang="en-US" smtClean="0"/>
-              <a:t>4/10/2026</a:t>
+              <a:t>5/7/2026</a:t>
             </a:fld>
             <a:endParaRPr lang="en-US"/>
           </a:p>
@@ -8582,7 +8582,7 @@
           <a:p>
             <a:fld id="{5BCAD085-E8A6-8845-BD4E-CB4CCA059FC4}" type="datetimeFigureOut">
               <a:rPr lang="en-US" smtClean="0"/>
-              <a:t>4/10/2026</a:t>
+              <a:t>5/7/2026</a:t>
             </a:fld>
             <a:endParaRPr lang="en-US"/>
           </a:p>
